--- a/public/fun/cards/public/public-18.pptx
+++ b/public/fun/cards/public/public-18.pptx
@@ -3085,7 +3085,7 @@
     <p:bg>
       <p:bgPr>
         <a:solidFill>
-          <a:srgbClr val="BA4A66"/>
+          <a:srgbClr val="F3F4F6"/>
         </a:solidFill>
         <a:effectLst/>
       </p:bgPr>
@@ -3099,43 +3099,14 @@
       <p:grpSpPr/>
       <p:sp>
         <p:nvSpPr>
-          <p:cNvPr id="2" name="Rectangle 1"/>
-          <p:cNvSpPr/>
+          <p:cNvPr id="2" name="텍스트"/>
+          <p:cNvSpPr txBox="1"/>
           <p:nvPr/>
         </p:nvSpPr>
         <p:spPr>
           <a:xfrm>
-            <a:off x="1944000" y="216000"/>
-            <a:ext cx="10800" cy="1368000"/>
-          </a:xfrm>
-          <a:prstGeom prst="rect">
-            <a:avLst/>
-          </a:prstGeom>
-          <a:solidFill>
-            <a:srgbClr val="F3CED7"/>
-          </a:solidFill>
-          <a:ln>
-            <a:noFill/>
-          </a:ln>
-        </p:spPr>
-        <p:txBody>
-          <a:bodyPr rtlCol="0" anchor="ctr"/>
-          <a:lstStyle/>
-          <a:p>
-            <a:pPr algn="ctr"/>
-          </a:p>
-        </p:txBody>
-      </p:sp>
-      <p:sp>
-        <p:nvSpPr>
-          <p:cNvPr id="3" name="텍스트"/>
-          <p:cNvSpPr txBox="1"/>
-          <p:nvPr/>
-        </p:nvSpPr>
-        <p:spPr>
-          <a:xfrm>
-            <a:off x="216000" y="201600"/>
-            <a:ext cx="1584000" cy="100800"/>
+            <a:off x="252000" y="223200"/>
+            <a:ext cx="2016000" cy="133351"/>
           </a:xfrm>
           <a:prstGeom prst="rect">
             <a:avLst/>
@@ -3154,9 +3125,9 @@
               </a:lnSpc>
             </a:pPr>
             <a:r>
-              <a:rPr sz="700" b="1" spc="300">
+              <a:rPr sz="700" b="1" spc="200">
                 <a:solidFill>
-                  <a:srgbClr val="FBF6F7"/>
+                  <a:srgbClr val="6B7280"/>
                 </a:solidFill>
                 <a:latin typeface="맑은 고딕"/>
                 <a:ea typeface="맑은 고딕"/>
@@ -3168,119 +3139,14 @@
       </p:sp>
       <p:sp>
         <p:nvSpPr>
-          <p:cNvPr id="4" name="Freeform 3"/>
-          <p:cNvSpPr/>
+          <p:cNvPr id="3" name="텍스트"/>
+          <p:cNvSpPr txBox="1"/>
           <p:nvPr/>
         </p:nvSpPr>
         <p:spPr>
           <a:xfrm>
-            <a:off x="286704" y="440208"/>
-            <a:ext cx="218592" cy="99792"/>
-          </a:xfrm>
-          <a:custGeom>
-            <a:avLst/>
-            <a:gdLst/>
-            <a:ahLst/>
-            <a:cxnLst/>
-            <a:rect l="l" t="t" r="r" b="b"/>
-            <a:pathLst>
-              <a:path w="218592" h="99792">
-                <a:moveTo>
-                  <a:pt x="0" y="99792"/>
-                </a:moveTo>
-                <a:lnTo>
-                  <a:pt x="109296" y="0"/>
-                </a:lnTo>
-                <a:lnTo>
-                  <a:pt x="218592" y="99792"/>
-                </a:lnTo>
-                <a:close/>
-              </a:path>
-            </a:pathLst>
-          </a:custGeom>
-          <a:solidFill>
-            <a:srgbClr val="F3CED7"/>
-          </a:solidFill>
-          <a:ln>
-            <a:noFill/>
-          </a:ln>
-        </p:spPr>
-        <p:txBody>
-          <a:bodyPr rtlCol="0" anchor="ctr"/>
-          <a:lstStyle/>
-          <a:p>
-            <a:pPr algn="ctr"/>
-          </a:p>
-        </p:txBody>
-      </p:sp>
-      <p:sp>
-        <p:nvSpPr>
-          <p:cNvPr id="5" name="Rectangle 4"/>
-          <p:cNvSpPr/>
-          <p:nvPr/>
-        </p:nvSpPr>
-        <p:spPr>
-          <a:xfrm>
-            <a:off x="319968" y="540000"/>
-            <a:ext cx="152064" cy="99792"/>
-          </a:xfrm>
-          <a:prstGeom prst="rect">
-            <a:avLst/>
-          </a:prstGeom>
-          <a:solidFill>
-            <a:srgbClr val="C5677E"/>
-          </a:solidFill>
-          <a:ln>
-            <a:noFill/>
-          </a:ln>
-        </p:spPr>
-        <p:txBody>
-          <a:bodyPr rtlCol="0" anchor="ctr"/>
-          <a:lstStyle/>
-          <a:p>
-            <a:pPr algn="ctr"/>
-          </a:p>
-        </p:txBody>
-      </p:sp>
-      <p:sp>
-        <p:nvSpPr>
-          <p:cNvPr id="6" name="Rectangle 5"/>
-          <p:cNvSpPr/>
-          <p:nvPr/>
-        </p:nvSpPr>
-        <p:spPr>
-          <a:xfrm>
-            <a:off x="376992" y="573264"/>
-            <a:ext cx="38016" cy="66528"/>
-          </a:xfrm>
-          <a:prstGeom prst="rect">
-            <a:avLst/>
-          </a:prstGeom>
-          <a:solidFill>
-            <a:srgbClr val="F3CED7"/>
-          </a:solidFill>
-          <a:ln>
-            <a:noFill/>
-          </a:ln>
-        </p:spPr>
-        <p:txBody>
-          <a:bodyPr rtlCol="0" anchor="ctr"/>
-          <a:lstStyle/>
-          <a:p>
-            <a:pPr algn="ctr"/>
-          </a:p>
-        </p:txBody>
-      </p:sp>
-      <p:sp>
-        <p:nvSpPr>
-          <p:cNvPr id="7" name="텍스트"/>
-          <p:cNvSpPr txBox="1"/>
-          <p:nvPr/>
-        </p:nvSpPr>
-        <p:spPr>
-          <a:xfrm>
-            <a:off x="216000" y="972000"/>
-            <a:ext cx="1728000" cy="122400"/>
+            <a:off x="252000" y="468000"/>
+            <a:ext cx="2520000" cy="360000"/>
           </a:xfrm>
           <a:prstGeom prst="rect">
             <a:avLst/>
@@ -3295,32 +3161,32 @@
           <a:p>
             <a:pPr algn="l">
               <a:lnSpc>
-                <a:spcPts val="1232"/>
+                <a:spcPts val="3190"/>
               </a:lnSpc>
             </a:pPr>
             <a:r>
-              <a:rPr sz="850" b="1">
+              <a:rPr sz="2200" b="1">
                 <a:solidFill>
-                  <a:srgbClr val="FCF3F5"/>
+                  <a:srgbClr val="12151C"/>
                 </a:solidFill>
                 <a:latin typeface="맑은 고딕"/>
                 <a:ea typeface="맑은 고딕"/>
               </a:rPr>
-              <a:t>민원담당</a:t>
-            </a:r>
-          </a:p>
-        </p:txBody>
-      </p:sp>
-      <p:sp>
-        <p:nvSpPr>
-          <p:cNvPr id="8" name="텍스트"/>
+              <a:t>송현우</a:t>
+            </a:r>
+          </a:p>
+        </p:txBody>
+      </p:sp>
+      <p:sp>
+        <p:nvSpPr>
+          <p:cNvPr id="4" name="텍스트"/>
           <p:cNvSpPr txBox="1"/>
           <p:nvPr/>
         </p:nvSpPr>
         <p:spPr>
           <a:xfrm>
-            <a:off x="216000" y="1123200"/>
-            <a:ext cx="1728000" cy="346712"/>
+            <a:off x="252000" y="871200"/>
+            <a:ext cx="2520000" cy="171451"/>
           </a:xfrm>
           <a:prstGeom prst="rect">
             <a:avLst/>
@@ -3335,32 +3201,32 @@
           <a:p>
             <a:pPr algn="l">
               <a:lnSpc>
-                <a:spcPts val="3045"/>
+                <a:spcPts val="1305"/>
               </a:lnSpc>
             </a:pPr>
             <a:r>
-              <a:rPr sz="2100" b="1" spc="50">
+              <a:rPr sz="900" b="0">
                 <a:solidFill>
-                  <a:srgbClr val="FFFFFF"/>
+                  <a:srgbClr val="6B7280"/>
                 </a:solidFill>
-                <a:latin typeface="바탕"/>
-                <a:ea typeface="바탕"/>
+                <a:latin typeface="맑은 고딕"/>
+                <a:ea typeface="맑은 고딕"/>
               </a:rPr>
-              <a:t>송현우</a:t>
-            </a:r>
-          </a:p>
-        </p:txBody>
-      </p:sp>
-      <p:sp>
-        <p:nvSpPr>
-          <p:cNvPr id="9" name="텍스트"/>
+              <a:t>민원담당</a:t>
+            </a:r>
+          </a:p>
+        </p:txBody>
+      </p:sp>
+      <p:sp>
+        <p:nvSpPr>
+          <p:cNvPr id="5" name="텍스트"/>
           <p:cNvSpPr txBox="1"/>
           <p:nvPr/>
         </p:nvSpPr>
         <p:spPr>
           <a:xfrm>
-            <a:off x="2073600" y="540000"/>
-            <a:ext cx="122400" cy="168911"/>
+            <a:off x="252000" y="1216800"/>
+            <a:ext cx="2520000" cy="129541"/>
           </a:xfrm>
           <a:prstGeom prst="rect">
             <a:avLst/>
@@ -3375,32 +3241,61 @@
           <a:p>
             <a:pPr algn="l">
               <a:lnSpc>
-                <a:spcPts val="1015"/>
+                <a:spcPts val="986"/>
               </a:lnSpc>
             </a:pPr>
             <a:r>
-              <a:rPr sz="700" b="1">
+              <a:rPr sz="680" b="0">
                 <a:solidFill>
-                  <a:srgbClr val="FCF3F5"/>
+                  <a:srgbClr val="6B7280"/>
                 </a:solidFill>
                 <a:latin typeface="맑은 고딕"/>
                 <a:ea typeface="맑은 고딕"/>
               </a:rPr>
-              <a:t>T</a:t>
-            </a:r>
-          </a:p>
-        </p:txBody>
-      </p:sp>
-      <p:sp>
-        <p:nvSpPr>
-          <p:cNvPr id="10" name="텍스트"/>
+              <a:t>주소를 입력해 주세요</a:t>
+            </a:r>
+          </a:p>
+        </p:txBody>
+      </p:sp>
+      <p:sp>
+        <p:nvSpPr>
+          <p:cNvPr id="6" name="Rectangle 5"/>
+          <p:cNvSpPr/>
+          <p:nvPr/>
+        </p:nvSpPr>
+        <p:spPr>
+          <a:xfrm>
+            <a:off x="0" y="1476000"/>
+            <a:ext cx="3240000" cy="324000"/>
+          </a:xfrm>
+          <a:prstGeom prst="rect">
+            <a:avLst/>
+          </a:prstGeom>
+          <a:solidFill>
+            <a:srgbClr val="2E9BFF"/>
+          </a:solidFill>
+          <a:ln>
+            <a:noFill/>
+          </a:ln>
+        </p:spPr>
+        <p:txBody>
+          <a:bodyPr rtlCol="0" anchor="ctr"/>
+          <a:lstStyle/>
+          <a:p>
+            <a:pPr algn="ctr"/>
+          </a:p>
+        </p:txBody>
+      </p:sp>
+      <p:sp>
+        <p:nvSpPr>
+          <p:cNvPr id="7" name="텍스트"/>
           <p:cNvSpPr txBox="1"/>
           <p:nvPr/>
         </p:nvSpPr>
         <p:spPr>
           <a:xfrm>
-            <a:off x="2217600" y="540000"/>
-            <a:ext cx="900000" cy="168911"/>
+            <a:off x="252000" y="1569600"/>
+            <a:ext cx="1296000" cy="133351"/>
           </a:xfrm>
           <a:prstGeom prst="rect">
             <a:avLst/>
@@ -3419,9 +3314,9 @@
               </a:lnSpc>
             </a:pPr>
             <a:r>
-              <a:rPr sz="700" b="0">
+              <a:rPr sz="700" b="1">
                 <a:solidFill>
-                  <a:srgbClr val="FFFFFF"/>
+                  <a:srgbClr val="12151C"/>
                 </a:solidFill>
                 <a:latin typeface="맑은 고딕"/>
                 <a:ea typeface="맑은 고딕"/>
@@ -3433,14 +3328,14 @@
       </p:sp>
       <p:sp>
         <p:nvSpPr>
-          <p:cNvPr id="11" name="텍스트"/>
+          <p:cNvPr id="8" name="텍스트"/>
           <p:cNvSpPr txBox="1"/>
           <p:nvPr/>
         </p:nvSpPr>
         <p:spPr>
           <a:xfrm>
-            <a:off x="2073600" y="708911"/>
-            <a:ext cx="122400" cy="168911"/>
+            <a:off x="1656000" y="1569600"/>
+            <a:ext cx="1368000" cy="133351"/>
           </a:xfrm>
           <a:prstGeom prst="rect">
             <a:avLst/>
@@ -3461,132 +3356,12 @@
             <a:r>
               <a:rPr sz="700" b="1">
                 <a:solidFill>
-                  <a:srgbClr val="FCF3F5"/>
-                </a:solidFill>
-                <a:latin typeface="맑은 고딕"/>
-                <a:ea typeface="맑은 고딕"/>
-              </a:rPr>
-              <a:t>E</a:t>
-            </a:r>
-          </a:p>
-        </p:txBody>
-      </p:sp>
-      <p:sp>
-        <p:nvSpPr>
-          <p:cNvPr id="12" name="텍스트"/>
-          <p:cNvSpPr txBox="1"/>
-          <p:nvPr/>
-        </p:nvSpPr>
-        <p:spPr>
-          <a:xfrm>
-            <a:off x="2217600" y="708911"/>
-            <a:ext cx="900000" cy="168911"/>
-          </a:xfrm>
-          <a:prstGeom prst="rect">
-            <a:avLst/>
-          </a:prstGeom>
-          <a:noFill/>
-        </p:spPr>
-        <p:txBody>
-          <a:bodyPr wrap="square" lIns="0" rIns="0" tIns="0" bIns="0" anchor="t">
-            <a:spAutoFit/>
-          </a:bodyPr>
-          <a:lstStyle/>
-          <a:p>
-            <a:pPr algn="l">
-              <a:lnSpc>
-                <a:spcPts val="1015"/>
-              </a:lnSpc>
-            </a:pPr>
-            <a:r>
-              <a:rPr sz="700" b="0">
-                <a:solidFill>
-                  <a:srgbClr val="FFFFFF"/>
+                  <a:srgbClr val="12151C"/>
                 </a:solidFill>
                 <a:latin typeface="맑은 고딕"/>
                 <a:ea typeface="맑은 고딕"/>
               </a:rPr>
               <a:t>name@example.com</a:t>
-            </a:r>
-          </a:p>
-        </p:txBody>
-      </p:sp>
-      <p:sp>
-        <p:nvSpPr>
-          <p:cNvPr id="13" name="텍스트"/>
-          <p:cNvSpPr txBox="1"/>
-          <p:nvPr/>
-        </p:nvSpPr>
-        <p:spPr>
-          <a:xfrm>
-            <a:off x="2073600" y="877822"/>
-            <a:ext cx="122400" cy="168911"/>
-          </a:xfrm>
-          <a:prstGeom prst="rect">
-            <a:avLst/>
-          </a:prstGeom>
-          <a:noFill/>
-        </p:spPr>
-        <p:txBody>
-          <a:bodyPr wrap="square" lIns="0" rIns="0" tIns="0" bIns="0" anchor="t">
-            <a:spAutoFit/>
-          </a:bodyPr>
-          <a:lstStyle/>
-          <a:p>
-            <a:pPr algn="l">
-              <a:lnSpc>
-                <a:spcPts val="1015"/>
-              </a:lnSpc>
-            </a:pPr>
-            <a:r>
-              <a:rPr sz="700" b="1">
-                <a:solidFill>
-                  <a:srgbClr val="FCF3F5"/>
-                </a:solidFill>
-                <a:latin typeface="맑은 고딕"/>
-                <a:ea typeface="맑은 고딕"/>
-              </a:rPr>
-              <a:t>A</a:t>
-            </a:r>
-          </a:p>
-        </p:txBody>
-      </p:sp>
-      <p:sp>
-        <p:nvSpPr>
-          <p:cNvPr id="14" name="텍스트"/>
-          <p:cNvSpPr txBox="1"/>
-          <p:nvPr/>
-        </p:nvSpPr>
-        <p:spPr>
-          <a:xfrm>
-            <a:off x="2217600" y="877822"/>
-            <a:ext cx="900000" cy="168911"/>
-          </a:xfrm>
-          <a:prstGeom prst="rect">
-            <a:avLst/>
-          </a:prstGeom>
-          <a:noFill/>
-        </p:spPr>
-        <p:txBody>
-          <a:bodyPr wrap="square" lIns="0" rIns="0" tIns="0" bIns="0" anchor="t">
-            <a:spAutoFit/>
-          </a:bodyPr>
-          <a:lstStyle/>
-          <a:p>
-            <a:pPr algn="l">
-              <a:lnSpc>
-                <a:spcPts val="1015"/>
-              </a:lnSpc>
-            </a:pPr>
-            <a:r>
-              <a:rPr sz="700" b="0">
-                <a:solidFill>
-                  <a:srgbClr val="FFFFFF"/>
-                </a:solidFill>
-                <a:latin typeface="맑은 고딕"/>
-                <a:ea typeface="맑은 고딕"/>
-              </a:rPr>
-              <a:t>주소를 입력해 주세요</a:t>
             </a:r>
           </a:p>
         </p:txBody>
@@ -3605,7 +3380,7 @@
     <p:bg>
       <p:bgPr>
         <a:solidFill>
-          <a:srgbClr val="BA4A66"/>
+          <a:srgbClr val="2E9BFF"/>
         </a:solidFill>
         <a:effectLst/>
       </p:bgPr>
@@ -3619,291 +3394,14 @@
       <p:grpSpPr/>
       <p:sp>
         <p:nvSpPr>
-          <p:cNvPr id="2" name="Freeform 1"/>
-          <p:cNvSpPr/>
-          <p:nvPr/>
-        </p:nvSpPr>
-        <p:spPr>
-          <a:xfrm>
-            <a:off x="2016000" y="576000"/>
-            <a:ext cx="1224000" cy="1224000"/>
-          </a:xfrm>
-          <a:custGeom>
-            <a:avLst/>
-            <a:gdLst/>
-            <a:ahLst/>
-            <a:cxnLst/>
-            <a:rect l="l" t="t" r="r" b="b"/>
-            <a:pathLst>
-              <a:path w="1224000" h="1224000">
-                <a:moveTo>
-                  <a:pt x="1224000" y="1224000"/>
-                </a:moveTo>
-                <a:lnTo>
-                  <a:pt x="0" y="1224000"/>
-                </a:lnTo>
-                <a:lnTo>
-                  <a:pt x="7696" y="1086955"/>
-                </a:lnTo>
-                <a:lnTo>
-                  <a:pt x="30688" y="951634"/>
-                </a:lnTo>
-                <a:lnTo>
-                  <a:pt x="68687" y="819738"/>
-                </a:lnTo>
-                <a:lnTo>
-                  <a:pt x="121214" y="692926"/>
-                </a:lnTo>
-                <a:lnTo>
-                  <a:pt x="187610" y="572793"/>
-                </a:lnTo>
-                <a:lnTo>
-                  <a:pt x="267038" y="460848"/>
-                </a:lnTo>
-                <a:lnTo>
-                  <a:pt x="358501" y="358501"/>
-                </a:lnTo>
-                <a:lnTo>
-                  <a:pt x="460848" y="267038"/>
-                </a:lnTo>
-                <a:lnTo>
-                  <a:pt x="572793" y="187610"/>
-                </a:lnTo>
-                <a:lnTo>
-                  <a:pt x="692926" y="121214"/>
-                </a:lnTo>
-                <a:lnTo>
-                  <a:pt x="819738" y="68687"/>
-                </a:lnTo>
-                <a:lnTo>
-                  <a:pt x="951634" y="30688"/>
-                </a:lnTo>
-                <a:lnTo>
-                  <a:pt x="1086955" y="7696"/>
-                </a:lnTo>
-                <a:lnTo>
-                  <a:pt x="1224000" y="0"/>
-                </a:lnTo>
-                <a:close/>
-              </a:path>
-            </a:pathLst>
-          </a:custGeom>
-          <a:solidFill>
-            <a:srgbClr val="F3CED7"/>
-          </a:solidFill>
-          <a:ln>
-            <a:noFill/>
-          </a:ln>
-        </p:spPr>
-        <p:txBody>
-          <a:bodyPr rtlCol="0" anchor="ctr"/>
-          <a:lstStyle/>
-          <a:p>
-            <a:pPr algn="ctr"/>
-          </a:p>
-        </p:txBody>
-      </p:sp>
-      <p:sp>
-        <p:nvSpPr>
-          <p:cNvPr id="3" name="Freeform 2"/>
-          <p:cNvSpPr/>
-          <p:nvPr/>
-        </p:nvSpPr>
-        <p:spPr>
-          <a:xfrm>
-            <a:off x="2520000" y="1080000"/>
-            <a:ext cx="720000" cy="720000"/>
-          </a:xfrm>
-          <a:custGeom>
-            <a:avLst/>
-            <a:gdLst/>
-            <a:ahLst/>
-            <a:cxnLst/>
-            <a:rect l="l" t="t" r="r" b="b"/>
-            <a:pathLst>
-              <a:path w="720000" h="720000">
-                <a:moveTo>
-                  <a:pt x="720000" y="720000"/>
-                </a:moveTo>
-                <a:lnTo>
-                  <a:pt x="0" y="720000"/>
-                </a:lnTo>
-                <a:lnTo>
-                  <a:pt x="4527" y="639386"/>
-                </a:lnTo>
-                <a:lnTo>
-                  <a:pt x="18052" y="559785"/>
-                </a:lnTo>
-                <a:lnTo>
-                  <a:pt x="40404" y="482199"/>
-                </a:lnTo>
-                <a:lnTo>
-                  <a:pt x="71302" y="407604"/>
-                </a:lnTo>
-                <a:lnTo>
-                  <a:pt x="110359" y="336937"/>
-                </a:lnTo>
-                <a:lnTo>
-                  <a:pt x="157081" y="271087"/>
-                </a:lnTo>
-                <a:lnTo>
-                  <a:pt x="210883" y="210883"/>
-                </a:lnTo>
-                <a:lnTo>
-                  <a:pt x="271087" y="157081"/>
-                </a:lnTo>
-                <a:lnTo>
-                  <a:pt x="336937" y="110359"/>
-                </a:lnTo>
-                <a:lnTo>
-                  <a:pt x="407604" y="71302"/>
-                </a:lnTo>
-                <a:lnTo>
-                  <a:pt x="482199" y="40404"/>
-                </a:lnTo>
-                <a:lnTo>
-                  <a:pt x="559785" y="18052"/>
-                </a:lnTo>
-                <a:lnTo>
-                  <a:pt x="639386" y="4527"/>
-                </a:lnTo>
-                <a:lnTo>
-                  <a:pt x="720000" y="0"/>
-                </a:lnTo>
-                <a:close/>
-              </a:path>
-            </a:pathLst>
-          </a:custGeom>
-          <a:solidFill>
-            <a:srgbClr val="C5677E"/>
-          </a:solidFill>
-          <a:ln>
-            <a:noFill/>
-          </a:ln>
-        </p:spPr>
-        <p:txBody>
-          <a:bodyPr rtlCol="0" anchor="ctr"/>
-          <a:lstStyle/>
-          <a:p>
-            <a:pPr algn="ctr"/>
-          </a:p>
-        </p:txBody>
-      </p:sp>
-      <p:sp>
-        <p:nvSpPr>
-          <p:cNvPr id="4" name="Freeform 3"/>
-          <p:cNvSpPr/>
-          <p:nvPr/>
-        </p:nvSpPr>
-        <p:spPr>
-          <a:xfrm>
-            <a:off x="2764080" y="1370160"/>
-            <a:ext cx="231840" cy="105840"/>
-          </a:xfrm>
-          <a:custGeom>
-            <a:avLst/>
-            <a:gdLst/>
-            <a:ahLst/>
-            <a:cxnLst/>
-            <a:rect l="l" t="t" r="r" b="b"/>
-            <a:pathLst>
-              <a:path w="231840" h="105840">
-                <a:moveTo>
-                  <a:pt x="0" y="105840"/>
-                </a:moveTo>
-                <a:lnTo>
-                  <a:pt x="115920" y="0"/>
-                </a:lnTo>
-                <a:lnTo>
-                  <a:pt x="231840" y="105840"/>
-                </a:lnTo>
-                <a:close/>
-              </a:path>
-            </a:pathLst>
-          </a:custGeom>
-          <a:solidFill>
-            <a:srgbClr val="595959"/>
-          </a:solidFill>
-          <a:ln>
-            <a:noFill/>
-          </a:ln>
-        </p:spPr>
-        <p:txBody>
-          <a:bodyPr rtlCol="0" anchor="ctr"/>
-          <a:lstStyle/>
-          <a:p>
-            <a:pPr algn="ctr"/>
-          </a:p>
-        </p:txBody>
-      </p:sp>
-      <p:sp>
-        <p:nvSpPr>
-          <p:cNvPr id="5" name="Rectangle 4"/>
-          <p:cNvSpPr/>
-          <p:nvPr/>
-        </p:nvSpPr>
-        <p:spPr>
-          <a:xfrm>
-            <a:off x="2799360" y="1476000"/>
-            <a:ext cx="161280" cy="105840"/>
-          </a:xfrm>
-          <a:prstGeom prst="rect">
-            <a:avLst/>
-          </a:prstGeom>
-          <a:solidFill>
-            <a:srgbClr val="EEEEEE"/>
-          </a:solidFill>
-          <a:ln>
-            <a:noFill/>
-          </a:ln>
-        </p:spPr>
-        <p:txBody>
-          <a:bodyPr rtlCol="0" anchor="ctr"/>
-          <a:lstStyle/>
-          <a:p>
-            <a:pPr algn="ctr"/>
-          </a:p>
-        </p:txBody>
-      </p:sp>
-      <p:sp>
-        <p:nvSpPr>
-          <p:cNvPr id="6" name="Rectangle 5"/>
-          <p:cNvSpPr/>
-          <p:nvPr/>
-        </p:nvSpPr>
-        <p:spPr>
-          <a:xfrm>
-            <a:off x="2859840" y="1511280"/>
-            <a:ext cx="40320" cy="70560"/>
-          </a:xfrm>
-          <a:prstGeom prst="rect">
-            <a:avLst/>
-          </a:prstGeom>
-          <a:solidFill>
-            <a:srgbClr val="595959"/>
-          </a:solidFill>
-          <a:ln>
-            <a:noFill/>
-          </a:ln>
-        </p:spPr>
-        <p:txBody>
-          <a:bodyPr rtlCol="0" anchor="ctr"/>
-          <a:lstStyle/>
-          <a:p>
-            <a:pPr algn="ctr"/>
-          </a:p>
-        </p:txBody>
-      </p:sp>
-      <p:sp>
-        <p:nvSpPr>
-          <p:cNvPr id="7" name="텍스트"/>
+          <p:cNvPr id="2" name="텍스트"/>
           <p:cNvSpPr txBox="1"/>
           <p:nvPr/>
         </p:nvSpPr>
         <p:spPr>
           <a:xfrm>
             <a:off x="252000" y="324000"/>
-            <a:ext cx="1944000" cy="720000"/>
+            <a:ext cx="2520000" cy="792000"/>
           </a:xfrm>
           <a:prstGeom prst="rect">
             <a:avLst/>
@@ -3918,49 +3416,61 @@
           <a:p>
             <a:pPr algn="l">
               <a:lnSpc>
-                <a:spcPts val="1739"/>
+                <a:spcPts val="1884"/>
               </a:lnSpc>
             </a:pPr>
             <a:r>
-              <a:rPr sz="1200" b="1">
+              <a:rPr sz="1300" b="1">
                 <a:solidFill>
-                  <a:srgbClr val="FFFFFF"/>
+                  <a:srgbClr val="12151C"/>
                 </a:solidFill>
-                <a:latin typeface="바탕"/>
-                <a:ea typeface="바탕"/>
+                <a:latin typeface="맑은 고딕"/>
+                <a:ea typeface="맑은 고딕"/>
               </a:rPr>
-              <a:t>맡은 자리에서</a:t>
-            </a:r>
-          </a:p>
-          <a:p>
-            <a:pPr algn="l">
-              <a:lnSpc>
-                <a:spcPts val="1739"/>
-              </a:lnSpc>
-            </a:pPr>
-            <a:r>
-              <a:rPr sz="1200" b="1">
-                <a:solidFill>
-                  <a:srgbClr val="FFFFFF"/>
-                </a:solidFill>
-                <a:latin typeface="바탕"/>
-                <a:ea typeface="바탕"/>
-              </a:rPr>
-              <a:t>성실을 다합니다</a:t>
-            </a:r>
-          </a:p>
-        </p:txBody>
-      </p:sp>
-      <p:sp>
-        <p:nvSpPr>
-          <p:cNvPr id="8" name="텍스트"/>
+              <a:t>맡은 자리에서 성실을 다합니다</a:t>
+            </a:r>
+          </a:p>
+        </p:txBody>
+      </p:sp>
+      <p:sp>
+        <p:nvSpPr>
+          <p:cNvPr id="3" name="Rectangle 2"/>
+          <p:cNvSpPr/>
+          <p:nvPr/>
+        </p:nvSpPr>
+        <p:spPr>
+          <a:xfrm>
+            <a:off x="0" y="1476000"/>
+            <a:ext cx="3240000" cy="324000"/>
+          </a:xfrm>
+          <a:prstGeom prst="rect">
+            <a:avLst/>
+          </a:prstGeom>
+          <a:solidFill>
+            <a:srgbClr val="58AFFF"/>
+          </a:solidFill>
+          <a:ln>
+            <a:noFill/>
+          </a:ln>
+        </p:spPr>
+        <p:txBody>
+          <a:bodyPr rtlCol="0" anchor="ctr"/>
+          <a:lstStyle/>
+          <a:p>
+            <a:pPr algn="ctr"/>
+          </a:p>
+        </p:txBody>
+      </p:sp>
+      <p:sp>
+        <p:nvSpPr>
+          <p:cNvPr id="4" name="텍스트"/>
           <p:cNvSpPr txBox="1"/>
           <p:nvPr/>
         </p:nvSpPr>
         <p:spPr>
           <a:xfrm>
-            <a:off x="252000" y="1476000"/>
-            <a:ext cx="1440000" cy="108000"/>
+            <a:off x="252000" y="1569600"/>
+            <a:ext cx="1872000" cy="142876"/>
           </a:xfrm>
           <a:prstGeom prst="rect">
             <a:avLst/>
@@ -3981,13 +3491,104 @@
             <a:r>
               <a:rPr sz="750" b="1" spc="200">
                 <a:solidFill>
-                  <a:srgbClr val="FBF6F7"/>
+                  <a:srgbClr val="12151C"/>
                 </a:solidFill>
                 <a:latin typeface="맑은 고딕"/>
                 <a:ea typeface="맑은 고딕"/>
               </a:rPr>
               <a:t>기관명 · 부서명</a:t>
             </a:r>
+          </a:p>
+        </p:txBody>
+      </p:sp>
+      <p:sp>
+        <p:nvSpPr>
+          <p:cNvPr id="5" name="Oval 4"/>
+          <p:cNvSpPr/>
+          <p:nvPr/>
+        </p:nvSpPr>
+        <p:spPr>
+          <a:xfrm>
+            <a:off x="2714400" y="1616400"/>
+            <a:ext cx="43200" cy="43200"/>
+          </a:xfrm>
+          <a:prstGeom prst="ellipse">
+            <a:avLst/>
+          </a:prstGeom>
+          <a:solidFill>
+            <a:srgbClr val="12151C"/>
+          </a:solidFill>
+          <a:ln>
+            <a:noFill/>
+          </a:ln>
+        </p:spPr>
+        <p:txBody>
+          <a:bodyPr rtlCol="0" anchor="ctr"/>
+          <a:lstStyle/>
+          <a:p>
+            <a:pPr algn="ctr"/>
+          </a:p>
+        </p:txBody>
+      </p:sp>
+      <p:sp>
+        <p:nvSpPr>
+          <p:cNvPr id="6" name="Oval 5"/>
+          <p:cNvSpPr/>
+          <p:nvPr/>
+        </p:nvSpPr>
+        <p:spPr>
+          <a:xfrm>
+            <a:off x="2822400" y="1616400"/>
+            <a:ext cx="43200" cy="43200"/>
+          </a:xfrm>
+          <a:prstGeom prst="ellipse">
+            <a:avLst/>
+          </a:prstGeom>
+          <a:solidFill>
+            <a:srgbClr val="12151C">
+              <a:alpha val="50000"/>
+            </a:srgbClr>
+          </a:solidFill>
+          <a:ln>
+            <a:noFill/>
+          </a:ln>
+        </p:spPr>
+        <p:txBody>
+          <a:bodyPr rtlCol="0" anchor="ctr"/>
+          <a:lstStyle/>
+          <a:p>
+            <a:pPr algn="ctr"/>
+          </a:p>
+        </p:txBody>
+      </p:sp>
+      <p:sp>
+        <p:nvSpPr>
+          <p:cNvPr id="7" name="Oval 6"/>
+          <p:cNvSpPr/>
+          <p:nvPr/>
+        </p:nvSpPr>
+        <p:spPr>
+          <a:xfrm>
+            <a:off x="2930400" y="1616400"/>
+            <a:ext cx="43200" cy="43200"/>
+          </a:xfrm>
+          <a:prstGeom prst="ellipse">
+            <a:avLst/>
+          </a:prstGeom>
+          <a:solidFill>
+            <a:srgbClr val="12151C">
+              <a:alpha val="50000"/>
+            </a:srgbClr>
+          </a:solidFill>
+          <a:ln>
+            <a:noFill/>
+          </a:ln>
+        </p:spPr>
+        <p:txBody>
+          <a:bodyPr rtlCol="0" anchor="ctr"/>
+          <a:lstStyle/>
+          <a:p>
+            <a:pPr algn="ctr"/>
           </a:p>
         </p:txBody>
       </p:sp>

--- a/public/fun/cards/public/public-18.pptx
+++ b/public/fun/cards/public/public-18.pptx
@@ -3105,8 +3105,8 @@
         </p:nvSpPr>
         <p:spPr>
           <a:xfrm>
-            <a:off x="252000" y="223200"/>
-            <a:ext cx="2016000" cy="133351"/>
+            <a:off x="252000" y="252000"/>
+            <a:ext cx="1512000" cy="123826"/>
           </a:xfrm>
           <a:prstGeom prst="rect">
             <a:avLst/>
@@ -3121,11 +3121,11 @@
           <a:p>
             <a:pPr algn="l">
               <a:lnSpc>
-                <a:spcPts val="1015"/>
+                <a:spcPts val="942"/>
               </a:lnSpc>
             </a:pPr>
             <a:r>
-              <a:rPr sz="700" b="1" spc="200">
+              <a:rPr sz="650" b="1" spc="220">
                 <a:solidFill>
                   <a:srgbClr val="6B7280"/>
                 </a:solidFill>
@@ -3137,16 +3137,37 @@
           </a:p>
         </p:txBody>
       </p:sp>
-      <p:sp>
-        <p:nvSpPr>
-          <p:cNvPr id="3" name="텍스트"/>
+      <p:cxnSp>
+        <p:nvCxnSpPr>
+          <p:cNvPr id="3" name="Connector 2"/>
+          <p:cNvCxnSpPr/>
+          <p:nvPr/>
+        </p:nvCxnSpPr>
+        <p:spPr>
+          <a:xfrm>
+            <a:off x="252000" y="388800"/>
+            <a:ext cx="2736000" cy="0"/>
+          </a:xfrm>
+          <a:prstGeom prst="line">
+            <a:avLst/>
+          </a:prstGeom>
+          <a:ln w="3600">
+            <a:solidFill>
+              <a:srgbClr val="DCDFE4"/>
+            </a:solidFill>
+          </a:ln>
+        </p:spPr>
+      </p:cxnSp>
+      <p:sp>
+        <p:nvSpPr>
+          <p:cNvPr id="4" name="텍스트"/>
           <p:cNvSpPr txBox="1"/>
           <p:nvPr/>
         </p:nvSpPr>
         <p:spPr>
           <a:xfrm>
-            <a:off x="252000" y="468000"/>
-            <a:ext cx="2520000" cy="360000"/>
+            <a:off x="252000" y="576000"/>
+            <a:ext cx="1800000" cy="237600"/>
           </a:xfrm>
           <a:prstGeom prst="rect">
             <a:avLst/>
@@ -3161,11 +3182,11 @@
           <a:p>
             <a:pPr algn="l">
               <a:lnSpc>
-                <a:spcPts val="3190"/>
+                <a:spcPts val="1957"/>
               </a:lnSpc>
             </a:pPr>
             <a:r>
-              <a:rPr sz="2200" b="1">
+              <a:rPr sz="1350" b="1" spc="120">
                 <a:solidFill>
                   <a:srgbClr val="12151C"/>
                 </a:solidFill>
@@ -3179,14 +3200,14 @@
       </p:sp>
       <p:sp>
         <p:nvSpPr>
-          <p:cNvPr id="4" name="텍스트"/>
+          <p:cNvPr id="5" name="텍스트"/>
           <p:cNvSpPr txBox="1"/>
           <p:nvPr/>
         </p:nvSpPr>
         <p:spPr>
           <a:xfrm>
-            <a:off x="252000" y="871200"/>
-            <a:ext cx="2520000" cy="171451"/>
+            <a:off x="252000" y="828000"/>
+            <a:ext cx="1800000" cy="133351"/>
           </a:xfrm>
           <a:prstGeom prst="rect">
             <a:avLst/>
@@ -3201,11 +3222,11 @@
           <a:p>
             <a:pPr algn="l">
               <a:lnSpc>
-                <a:spcPts val="1305"/>
+                <a:spcPts val="1015"/>
               </a:lnSpc>
             </a:pPr>
             <a:r>
-              <a:rPr sz="900" b="0">
+              <a:rPr sz="700" b="0" spc="60">
                 <a:solidFill>
                   <a:srgbClr val="6B7280"/>
                 </a:solidFill>
@@ -3219,14 +3240,14 @@
       </p:sp>
       <p:sp>
         <p:nvSpPr>
-          <p:cNvPr id="5" name="텍스트"/>
+          <p:cNvPr id="6" name="텍스트"/>
           <p:cNvSpPr txBox="1"/>
           <p:nvPr/>
         </p:nvSpPr>
         <p:spPr>
           <a:xfrm>
-            <a:off x="252000" y="1216800"/>
-            <a:ext cx="2520000" cy="129541"/>
+            <a:off x="252000" y="1036800"/>
+            <a:ext cx="2520000" cy="123826"/>
           </a:xfrm>
           <a:prstGeom prst="rect">
             <a:avLst/>
@@ -3241,11 +3262,11 @@
           <a:p>
             <a:pPr algn="l">
               <a:lnSpc>
-                <a:spcPts val="986"/>
+                <a:spcPts val="942"/>
               </a:lnSpc>
             </a:pPr>
             <a:r>
-              <a:rPr sz="680" b="0">
+              <a:rPr sz="650" b="0">
                 <a:solidFill>
                   <a:srgbClr val="6B7280"/>
                 </a:solidFill>
@@ -3259,14 +3280,14 @@
       </p:sp>
       <p:sp>
         <p:nvSpPr>
-          <p:cNvPr id="6" name="Rectangle 5"/>
+          <p:cNvPr id="7" name="Rectangle 6"/>
           <p:cNvSpPr/>
           <p:nvPr/>
         </p:nvSpPr>
         <p:spPr>
           <a:xfrm>
-            <a:off x="0" y="1476000"/>
-            <a:ext cx="3240000" cy="324000"/>
+            <a:off x="0" y="1339200"/>
+            <a:ext cx="3240000" cy="460800"/>
           </a:xfrm>
           <a:prstGeom prst="rect">
             <a:avLst/>
@@ -3288,14 +3309,14 @@
       </p:sp>
       <p:sp>
         <p:nvSpPr>
-          <p:cNvPr id="7" name="텍스트"/>
+          <p:cNvPr id="8" name="텍스트"/>
           <p:cNvSpPr txBox="1"/>
           <p:nvPr/>
         </p:nvSpPr>
         <p:spPr>
           <a:xfrm>
-            <a:off x="252000" y="1569600"/>
-            <a:ext cx="1296000" cy="133351"/>
+            <a:off x="252000" y="1476000"/>
+            <a:ext cx="936000" cy="91441"/>
           </a:xfrm>
           <a:prstGeom prst="rect">
             <a:avLst/>
@@ -3310,11 +3331,53 @@
           <a:p>
             <a:pPr algn="l">
               <a:lnSpc>
-                <a:spcPts val="1015"/>
+                <a:spcPts val="696"/>
               </a:lnSpc>
             </a:pPr>
             <a:r>
-              <a:rPr sz="700" b="1">
+              <a:rPr sz="480" b="1" spc="140">
+                <a:solidFill>
+                  <a:srgbClr val="12151C">
+                    <a:alpha val="70000"/>
+                  </a:srgbClr>
+                </a:solidFill>
+                <a:latin typeface="맑은 고딕"/>
+                <a:ea typeface="맑은 고딕"/>
+              </a:rPr>
+              <a:t>TEL</a:t>
+            </a:r>
+          </a:p>
+        </p:txBody>
+      </p:sp>
+      <p:sp>
+        <p:nvSpPr>
+          <p:cNvPr id="9" name="텍스트"/>
+          <p:cNvSpPr txBox="1"/>
+          <p:nvPr/>
+        </p:nvSpPr>
+        <p:spPr>
+          <a:xfrm>
+            <a:off x="252000" y="1576800"/>
+            <a:ext cx="936000" cy="123826"/>
+          </a:xfrm>
+          <a:prstGeom prst="rect">
+            <a:avLst/>
+          </a:prstGeom>
+          <a:noFill/>
+        </p:spPr>
+        <p:txBody>
+          <a:bodyPr wrap="square" lIns="0" rIns="0" tIns="0" bIns="0" anchor="t">
+            <a:spAutoFit/>
+          </a:bodyPr>
+          <a:lstStyle/>
+          <a:p>
+            <a:pPr algn="l">
+              <a:lnSpc>
+                <a:spcPts val="942"/>
+              </a:lnSpc>
+            </a:pPr>
+            <a:r>
+              <a:rPr sz="650" b="1">
                 <a:solidFill>
                   <a:srgbClr val="12151C"/>
                 </a:solidFill>
@@ -3328,14 +3391,14 @@
       </p:sp>
       <p:sp>
         <p:nvSpPr>
-          <p:cNvPr id="8" name="텍스트"/>
+          <p:cNvPr id="10" name="텍스트"/>
           <p:cNvSpPr txBox="1"/>
           <p:nvPr/>
         </p:nvSpPr>
         <p:spPr>
           <a:xfrm>
-            <a:off x="1656000" y="1569600"/>
-            <a:ext cx="1368000" cy="133351"/>
+            <a:off x="1188000" y="1476000"/>
+            <a:ext cx="1080000" cy="91441"/>
           </a:xfrm>
           <a:prstGeom prst="rect">
             <a:avLst/>
@@ -3350,11 +3413,53 @@
           <a:p>
             <a:pPr algn="l">
               <a:lnSpc>
-                <a:spcPts val="1015"/>
+                <a:spcPts val="696"/>
               </a:lnSpc>
             </a:pPr>
             <a:r>
-              <a:rPr sz="700" b="1">
+              <a:rPr sz="480" b="1" spc="140">
+                <a:solidFill>
+                  <a:srgbClr val="12151C">
+                    <a:alpha val="70000"/>
+                  </a:srgbClr>
+                </a:solidFill>
+                <a:latin typeface="맑은 고딕"/>
+                <a:ea typeface="맑은 고딕"/>
+              </a:rPr>
+              <a:t>MAIL</a:t>
+            </a:r>
+          </a:p>
+        </p:txBody>
+      </p:sp>
+      <p:sp>
+        <p:nvSpPr>
+          <p:cNvPr id="11" name="텍스트"/>
+          <p:cNvSpPr txBox="1"/>
+          <p:nvPr/>
+        </p:nvSpPr>
+        <p:spPr>
+          <a:xfrm>
+            <a:off x="1188000" y="1576800"/>
+            <a:ext cx="1080000" cy="123826"/>
+          </a:xfrm>
+          <a:prstGeom prst="rect">
+            <a:avLst/>
+          </a:prstGeom>
+          <a:noFill/>
+        </p:spPr>
+        <p:txBody>
+          <a:bodyPr wrap="square" lIns="0" rIns="0" tIns="0" bIns="0" anchor="t">
+            <a:spAutoFit/>
+          </a:bodyPr>
+          <a:lstStyle/>
+          <a:p>
+            <a:pPr algn="l">
+              <a:lnSpc>
+                <a:spcPts val="942"/>
+              </a:lnSpc>
+            </a:pPr>
+            <a:r>
+              <a:rPr sz="650" b="1">
                 <a:solidFill>
                   <a:srgbClr val="12151C"/>
                 </a:solidFill>
@@ -3366,6 +3471,27 @@
           </a:p>
         </p:txBody>
       </p:sp>
+      <p:cxnSp>
+        <p:nvCxnSpPr>
+          <p:cNvPr id="12" name="Connector 11"/>
+          <p:cNvCxnSpPr/>
+          <p:nvPr/>
+        </p:nvCxnSpPr>
+        <p:spPr>
+          <a:xfrm>
+            <a:off x="1108800" y="1468800"/>
+            <a:ext cx="0" cy="208800"/>
+          </a:xfrm>
+          <a:prstGeom prst="line">
+            <a:avLst/>
+          </a:prstGeom>
+          <a:ln w="3600">
+            <a:solidFill>
+              <a:srgbClr val="12151C"/>
+            </a:solidFill>
+          </a:ln>
+        </p:spPr>
+      </p:cxnSp>
     </p:spTree>
   </p:cSld>
   <p:clrMapOvr>
@@ -3400,8 +3526,8 @@
         </p:nvSpPr>
         <p:spPr>
           <a:xfrm>
-            <a:off x="252000" y="324000"/>
-            <a:ext cx="2520000" cy="792000"/>
+            <a:off x="252000" y="252000"/>
+            <a:ext cx="1080000" cy="99061"/>
           </a:xfrm>
           <a:prstGeom prst="rect">
             <a:avLst/>
@@ -3416,18 +3542,18 @@
           <a:p>
             <a:pPr algn="l">
               <a:lnSpc>
-                <a:spcPts val="1884"/>
+                <a:spcPts val="754"/>
               </a:lnSpc>
             </a:pPr>
             <a:r>
-              <a:rPr sz="1300" b="1">
+              <a:rPr sz="520" b="1" spc="240">
                 <a:solidFill>
-                  <a:srgbClr val="12151C"/>
+                  <a:srgbClr val="18324E"/>
                 </a:solidFill>
                 <a:latin typeface="맑은 고딕"/>
                 <a:ea typeface="맑은 고딕"/>
               </a:rPr>
-              <a:t>맡은 자리에서 성실을 다합니다</a:t>
+              <a:t>담당 업무</a:t>
             </a:r>
           </a:p>
         </p:txBody>
@@ -3440,79 +3566,10 @@
         </p:nvSpPr>
         <p:spPr>
           <a:xfrm>
-            <a:off x="0" y="1476000"/>
-            <a:ext cx="3240000" cy="324000"/>
+            <a:off x="252000" y="352800"/>
+            <a:ext cx="108000" cy="14400"/>
           </a:xfrm>
           <a:prstGeom prst="rect">
-            <a:avLst/>
-          </a:prstGeom>
-          <a:solidFill>
-            <a:srgbClr val="58AFFF"/>
-          </a:solidFill>
-          <a:ln>
-            <a:noFill/>
-          </a:ln>
-        </p:spPr>
-        <p:txBody>
-          <a:bodyPr rtlCol="0" anchor="ctr"/>
-          <a:lstStyle/>
-          <a:p>
-            <a:pPr algn="ctr"/>
-          </a:p>
-        </p:txBody>
-      </p:sp>
-      <p:sp>
-        <p:nvSpPr>
-          <p:cNvPr id="4" name="텍스트"/>
-          <p:cNvSpPr txBox="1"/>
-          <p:nvPr/>
-        </p:nvSpPr>
-        <p:spPr>
-          <a:xfrm>
-            <a:off x="252000" y="1569600"/>
-            <a:ext cx="1872000" cy="142876"/>
-          </a:xfrm>
-          <a:prstGeom prst="rect">
-            <a:avLst/>
-          </a:prstGeom>
-          <a:noFill/>
-        </p:spPr>
-        <p:txBody>
-          <a:bodyPr wrap="square" lIns="0" rIns="0" tIns="0" bIns="0" anchor="t">
-            <a:spAutoFit/>
-          </a:bodyPr>
-          <a:lstStyle/>
-          <a:p>
-            <a:pPr algn="l">
-              <a:lnSpc>
-                <a:spcPts val="1087"/>
-              </a:lnSpc>
-            </a:pPr>
-            <a:r>
-              <a:rPr sz="750" b="1" spc="200">
-                <a:solidFill>
-                  <a:srgbClr val="12151C"/>
-                </a:solidFill>
-                <a:latin typeface="맑은 고딕"/>
-                <a:ea typeface="맑은 고딕"/>
-              </a:rPr>
-              <a:t>기관명 · 부서명</a:t>
-            </a:r>
-          </a:p>
-        </p:txBody>
-      </p:sp>
-      <p:sp>
-        <p:nvSpPr>
-          <p:cNvPr id="5" name="Oval 4"/>
-          <p:cNvSpPr/>
-          <p:nvPr/>
-        </p:nvSpPr>
-        <p:spPr>
-          <a:xfrm>
-            <a:off x="2714400" y="1616400"/>
-            <a:ext cx="43200" cy="43200"/>
-          </a:xfrm>
-          <a:prstGeom prst="ellipse">
             <a:avLst/>
           </a:prstGeom>
           <a:solidFill>
@@ -3530,27 +3587,230 @@
           </a:p>
         </p:txBody>
       </p:sp>
-      <p:sp>
-        <p:nvSpPr>
-          <p:cNvPr id="6" name="Oval 5"/>
+      <p:cxnSp>
+        <p:nvCxnSpPr>
+          <p:cNvPr id="4" name="Connector 3"/>
+          <p:cNvCxnSpPr/>
+          <p:nvPr/>
+        </p:nvCxnSpPr>
+        <p:spPr>
+          <a:xfrm>
+            <a:off x="252000" y="468000"/>
+            <a:ext cx="1512000" cy="0"/>
+          </a:xfrm>
+          <a:prstGeom prst="line">
+            <a:avLst/>
+          </a:prstGeom>
+          <a:ln w="3600">
+            <a:solidFill>
+              <a:srgbClr val="2365A4"/>
+            </a:solidFill>
+          </a:ln>
+        </p:spPr>
+      </p:cxnSp>
+      <p:sp>
+        <p:nvSpPr>
+          <p:cNvPr id="5" name="텍스트"/>
+          <p:cNvSpPr txBox="1"/>
+          <p:nvPr/>
+        </p:nvSpPr>
+        <p:spPr>
+          <a:xfrm>
+            <a:off x="252000" y="511200"/>
+            <a:ext cx="1260000" cy="133351"/>
+          </a:xfrm>
+          <a:prstGeom prst="rect">
+            <a:avLst/>
+          </a:prstGeom>
+          <a:noFill/>
+        </p:spPr>
+        <p:txBody>
+          <a:bodyPr wrap="square" lIns="0" rIns="0" tIns="0" bIns="0" anchor="t">
+            <a:spAutoFit/>
+          </a:bodyPr>
+          <a:lstStyle/>
+          <a:p>
+            <a:pPr algn="l">
+              <a:lnSpc>
+                <a:spcPts val="1015"/>
+              </a:lnSpc>
+            </a:pPr>
+            <a:r>
+              <a:rPr sz="700" b="0">
+                <a:solidFill>
+                  <a:srgbClr val="12151C"/>
+                </a:solidFill>
+                <a:latin typeface="맑은 고딕"/>
+                <a:ea typeface="맑은 고딕"/>
+              </a:rPr>
+              <a:t>문화 · 체육</a:t>
+            </a:r>
+          </a:p>
+        </p:txBody>
+      </p:sp>
+      <p:cxnSp>
+        <p:nvCxnSpPr>
+          <p:cNvPr id="6" name="Connector 5"/>
+          <p:cNvCxnSpPr/>
+          <p:nvPr/>
+        </p:nvCxnSpPr>
+        <p:spPr>
+          <a:xfrm>
+            <a:off x="252000" y="655200"/>
+            <a:ext cx="1512000" cy="0"/>
+          </a:xfrm>
+          <a:prstGeom prst="line">
+            <a:avLst/>
+          </a:prstGeom>
+          <a:ln w="3600">
+            <a:solidFill>
+              <a:srgbClr val="2365A4"/>
+            </a:solidFill>
+          </a:ln>
+        </p:spPr>
+      </p:cxnSp>
+      <p:sp>
+        <p:nvSpPr>
+          <p:cNvPr id="7" name="텍스트"/>
+          <p:cNvSpPr txBox="1"/>
+          <p:nvPr/>
+        </p:nvSpPr>
+        <p:spPr>
+          <a:xfrm>
+            <a:off x="252000" y="698400"/>
+            <a:ext cx="1260000" cy="133351"/>
+          </a:xfrm>
+          <a:prstGeom prst="rect">
+            <a:avLst/>
+          </a:prstGeom>
+          <a:noFill/>
+        </p:spPr>
+        <p:txBody>
+          <a:bodyPr wrap="square" lIns="0" rIns="0" tIns="0" bIns="0" anchor="t">
+            <a:spAutoFit/>
+          </a:bodyPr>
+          <a:lstStyle/>
+          <a:p>
+            <a:pPr algn="l">
+              <a:lnSpc>
+                <a:spcPts val="1015"/>
+              </a:lnSpc>
+            </a:pPr>
+            <a:r>
+              <a:rPr sz="700" b="0">
+                <a:solidFill>
+                  <a:srgbClr val="12151C"/>
+                </a:solidFill>
+                <a:latin typeface="맑은 고딕"/>
+                <a:ea typeface="맑은 고딕"/>
+              </a:rPr>
+              <a:t>노인 복지</a:t>
+            </a:r>
+          </a:p>
+        </p:txBody>
+      </p:sp>
+      <p:cxnSp>
+        <p:nvCxnSpPr>
+          <p:cNvPr id="8" name="Connector 7"/>
+          <p:cNvCxnSpPr/>
+          <p:nvPr/>
+        </p:nvCxnSpPr>
+        <p:spPr>
+          <a:xfrm>
+            <a:off x="252000" y="842400"/>
+            <a:ext cx="1512000" cy="0"/>
+          </a:xfrm>
+          <a:prstGeom prst="line">
+            <a:avLst/>
+          </a:prstGeom>
+          <a:ln w="3600">
+            <a:solidFill>
+              <a:srgbClr val="2365A4"/>
+            </a:solidFill>
+          </a:ln>
+        </p:spPr>
+      </p:cxnSp>
+      <p:sp>
+        <p:nvSpPr>
+          <p:cNvPr id="9" name="텍스트"/>
+          <p:cNvSpPr txBox="1"/>
+          <p:nvPr/>
+        </p:nvSpPr>
+        <p:spPr>
+          <a:xfrm>
+            <a:off x="252000" y="885600"/>
+            <a:ext cx="1260000" cy="133351"/>
+          </a:xfrm>
+          <a:prstGeom prst="rect">
+            <a:avLst/>
+          </a:prstGeom>
+          <a:noFill/>
+        </p:spPr>
+        <p:txBody>
+          <a:bodyPr wrap="square" lIns="0" rIns="0" tIns="0" bIns="0" anchor="t">
+            <a:spAutoFit/>
+          </a:bodyPr>
+          <a:lstStyle/>
+          <a:p>
+            <a:pPr algn="l">
+              <a:lnSpc>
+                <a:spcPts val="1015"/>
+              </a:lnSpc>
+            </a:pPr>
+            <a:r>
+              <a:rPr sz="700" b="0">
+                <a:solidFill>
+                  <a:srgbClr val="12151C"/>
+                </a:solidFill>
+                <a:latin typeface="맑은 고딕"/>
+                <a:ea typeface="맑은 고딕"/>
+              </a:rPr>
+              <a:t>보육 지원</a:t>
+            </a:r>
+          </a:p>
+        </p:txBody>
+      </p:sp>
+      <p:cxnSp>
+        <p:nvCxnSpPr>
+          <p:cNvPr id="10" name="Connector 9"/>
+          <p:cNvCxnSpPr/>
+          <p:nvPr/>
+        </p:nvCxnSpPr>
+        <p:spPr>
+          <a:xfrm>
+            <a:off x="252000" y="1029600"/>
+            <a:ext cx="1512000" cy="0"/>
+          </a:xfrm>
+          <a:prstGeom prst="line">
+            <a:avLst/>
+          </a:prstGeom>
+          <a:ln w="3600">
+            <a:solidFill>
+              <a:srgbClr val="2365A4"/>
+            </a:solidFill>
+          </a:ln>
+        </p:spPr>
+      </p:cxnSp>
+      <p:sp>
+        <p:nvSpPr>
+          <p:cNvPr id="11" name="Rectangle 10"/>
           <p:cNvSpPr/>
           <p:nvPr/>
         </p:nvSpPr>
         <p:spPr>
           <a:xfrm>
-            <a:off x="2822400" y="1616400"/>
-            <a:ext cx="43200" cy="43200"/>
-          </a:xfrm>
-          <a:prstGeom prst="ellipse">
+            <a:off x="2196000" y="396000"/>
+            <a:ext cx="720000" cy="720000"/>
+          </a:xfrm>
+          <a:prstGeom prst="rect">
             <a:avLst/>
           </a:prstGeom>
-          <a:solidFill>
-            <a:srgbClr val="12151C">
-              <a:alpha val="50000"/>
-            </a:srgbClr>
-          </a:solidFill>
-          <a:ln>
-            <a:noFill/>
+          <a:noFill/>
+          <a:ln w="4320">
+            <a:solidFill>
+              <a:srgbClr val="18324E"/>
+            </a:solidFill>
+            <a:prstDash val="dash"/>
           </a:ln>
         </p:spPr>
         <p:txBody>
@@ -3563,32 +3823,121 @@
       </p:sp>
       <p:sp>
         <p:nvSpPr>
-          <p:cNvPr id="7" name="Oval 6"/>
-          <p:cNvSpPr/>
+          <p:cNvPr id="12" name="텍스트"/>
+          <p:cNvSpPr txBox="1"/>
           <p:nvPr/>
         </p:nvSpPr>
         <p:spPr>
           <a:xfrm>
-            <a:off x="2930400" y="1616400"/>
-            <a:ext cx="43200" cy="43200"/>
-          </a:xfrm>
-          <a:prstGeom prst="ellipse">
+            <a:off x="2196000" y="396000"/>
+            <a:ext cx="720000" cy="720000"/>
+          </a:xfrm>
+          <a:prstGeom prst="rect">
             <a:avLst/>
           </a:prstGeom>
-          <a:solidFill>
-            <a:srgbClr val="12151C">
-              <a:alpha val="50000"/>
-            </a:srgbClr>
-          </a:solidFill>
-          <a:ln>
-            <a:noFill/>
-          </a:ln>
-        </p:spPr>
-        <p:txBody>
-          <a:bodyPr rtlCol="0" anchor="ctr"/>
-          <a:lstStyle/>
-          <a:p>
-            <a:pPr algn="ctr"/>
+          <a:noFill/>
+        </p:spPr>
+        <p:txBody>
+          <a:bodyPr wrap="square" lIns="0" rIns="0" tIns="0" bIns="0" anchor="ctr">
+            <a:spAutoFit/>
+          </a:bodyPr>
+          <a:lstStyle/>
+          <a:p>
+            <a:pPr algn="ctr">
+              <a:lnSpc>
+                <a:spcPts val="1305"/>
+              </a:lnSpc>
+            </a:pPr>
+            <a:r>
+              <a:rPr sz="900" b="1">
+                <a:solidFill>
+                  <a:srgbClr val="18324E"/>
+                </a:solidFill>
+                <a:latin typeface="맑은 고딕"/>
+                <a:ea typeface="맑은 고딕"/>
+              </a:rPr>
+              <a:t>QR</a:t>
+            </a:r>
+          </a:p>
+        </p:txBody>
+      </p:sp>
+      <p:sp>
+        <p:nvSpPr>
+          <p:cNvPr id="13" name="텍스트"/>
+          <p:cNvSpPr txBox="1"/>
+          <p:nvPr/>
+        </p:nvSpPr>
+        <p:spPr>
+          <a:xfrm>
+            <a:off x="2196000" y="1209600"/>
+            <a:ext cx="720000" cy="118111"/>
+          </a:xfrm>
+          <a:prstGeom prst="rect">
+            <a:avLst/>
+          </a:prstGeom>
+          <a:noFill/>
+        </p:spPr>
+        <p:txBody>
+          <a:bodyPr wrap="square" lIns="0" rIns="0" tIns="0" bIns="0" anchor="t">
+            <a:spAutoFit/>
+          </a:bodyPr>
+          <a:lstStyle/>
+          <a:p>
+            <a:pPr algn="ctr">
+              <a:lnSpc>
+                <a:spcPts val="899"/>
+              </a:lnSpc>
+            </a:pPr>
+            <a:r>
+              <a:rPr sz="620" b="0">
+                <a:solidFill>
+                  <a:srgbClr val="12151C"/>
+                </a:solidFill>
+                <a:latin typeface="맑은 고딕"/>
+                <a:ea typeface="맑은 고딕"/>
+              </a:rPr>
+              <a:t>blog.example.com</a:t>
+            </a:r>
+          </a:p>
+        </p:txBody>
+      </p:sp>
+      <p:sp>
+        <p:nvSpPr>
+          <p:cNvPr id="14" name="텍스트"/>
+          <p:cNvSpPr txBox="1"/>
+          <p:nvPr/>
+        </p:nvSpPr>
+        <p:spPr>
+          <a:xfrm>
+            <a:off x="2196000" y="1353600"/>
+            <a:ext cx="720000" cy="118111"/>
+          </a:xfrm>
+          <a:prstGeom prst="rect">
+            <a:avLst/>
+          </a:prstGeom>
+          <a:noFill/>
+        </p:spPr>
+        <p:txBody>
+          <a:bodyPr wrap="square" lIns="0" rIns="0" tIns="0" bIns="0" anchor="t">
+            <a:spAutoFit/>
+          </a:bodyPr>
+          <a:lstStyle/>
+          <a:p>
+            <a:pPr algn="ctr">
+              <a:lnSpc>
+                <a:spcPts val="899"/>
+              </a:lnSpc>
+            </a:pPr>
+            <a:r>
+              <a:rPr sz="620" b="0">
+                <a:solidFill>
+                  <a:srgbClr val="18324E"/>
+                </a:solidFill>
+                <a:latin typeface="맑은 고딕"/>
+                <a:ea typeface="맑은 고딕"/>
+              </a:rPr>
+              <a:t>평일 09:00 – 17:30</a:t>
+            </a:r>
           </a:p>
         </p:txBody>
       </p:sp>
